--- a/assets/powerpoints/module-n1-presenter/E1-je-me-lance.pptx
+++ b/assets/powerpoints/module-n1-presenter/E1-je-me-lance.pptx
@@ -6014,7 +6014,97 @@
                 </a:solidFill>
                 <a:latin typeface="Verdana"/>
               </a:rPr>
-              <a:t>Dans l'activité : &lt;b&gt;à l'accueil&lt;/b&gt; (on vous demande votre nom), &lt;b&gt;dans la classe&lt;/b&gt; (une nouvelle personne s'assoit à côté de vous), &lt;b&gt;au secrétariat&lt;/b&gt; (on remplit votre fiche). Vous choisissez d'être &lt;b&gt;l'élève&lt;/b&gt; ou &lt;b&gt;la personne qui accueille&lt;/b&gt;.</a:t>
+              <a:t>Dans l'activité : </a:t>
+            </a:r>
+            <a:r>
+              <a:rPr sz="2000" b="1" i="0">
+                <a:solidFill>
+                  <a:srgbClr val="4B4F52"/>
+                </a:solidFill>
+                <a:latin typeface="Verdana"/>
+              </a:rPr>
+              <a:t>à l'accueil</a:t>
+            </a:r>
+            <a:r>
+              <a:rPr sz="2000" b="0" i="0">
+                <a:solidFill>
+                  <a:srgbClr val="4B4F52"/>
+                </a:solidFill>
+                <a:latin typeface="Verdana"/>
+              </a:rPr>
+              <a:t> (on vous demande votre nom), </a:t>
+            </a:r>
+            <a:r>
+              <a:rPr sz="2000" b="1" i="0">
+                <a:solidFill>
+                  <a:srgbClr val="4B4F52"/>
+                </a:solidFill>
+                <a:latin typeface="Verdana"/>
+              </a:rPr>
+              <a:t>dans la classe</a:t>
+            </a:r>
+            <a:r>
+              <a:rPr sz="2000" b="0" i="0">
+                <a:solidFill>
+                  <a:srgbClr val="4B4F52"/>
+                </a:solidFill>
+                <a:latin typeface="Verdana"/>
+              </a:rPr>
+              <a:t> (une nouvelle personne s'assoit à côté de vous), </a:t>
+            </a:r>
+            <a:r>
+              <a:rPr sz="2000" b="1" i="0">
+                <a:solidFill>
+                  <a:srgbClr val="4B4F52"/>
+                </a:solidFill>
+                <a:latin typeface="Verdana"/>
+              </a:rPr>
+              <a:t>au secrétariat</a:t>
+            </a:r>
+            <a:r>
+              <a:rPr sz="2000" b="0" i="0">
+                <a:solidFill>
+                  <a:srgbClr val="4B4F52"/>
+                </a:solidFill>
+                <a:latin typeface="Verdana"/>
+              </a:rPr>
+              <a:t> (on remplit votre fiche). Vous choisissez d'être </a:t>
+            </a:r>
+            <a:r>
+              <a:rPr sz="2000" b="1" i="0">
+                <a:solidFill>
+                  <a:srgbClr val="4B4F52"/>
+                </a:solidFill>
+                <a:latin typeface="Verdana"/>
+              </a:rPr>
+              <a:t>l'élève</a:t>
+            </a:r>
+            <a:r>
+              <a:rPr sz="2000" b="0" i="0">
+                <a:solidFill>
+                  <a:srgbClr val="4B4F52"/>
+                </a:solidFill>
+                <a:latin typeface="Verdana"/>
+              </a:rPr>
+              <a:t> ou </a:t>
+            </a:r>
+            <a:r>
+              <a:rPr sz="2000" b="1" i="0">
+                <a:solidFill>
+                  <a:srgbClr val="4B4F52"/>
+                </a:solidFill>
+                <a:latin typeface="Verdana"/>
+              </a:rPr>
+              <a:t>la personne qui accueille</a:t>
+            </a:r>
+            <a:r>
+              <a:rPr sz="2000" b="0" i="0">
+                <a:solidFill>
+                  <a:srgbClr val="4B4F52"/>
+                </a:solidFill>
+                <a:latin typeface="Verdana"/>
+              </a:rPr>
+              <a:t>.</a:t>
             </a:r>
           </a:p>
         </p:txBody>
@@ -8417,7 +8507,25 @@
                 </a:solidFill>
                 <a:latin typeface="Verdana"/>
               </a:rPr>
-              <a:t>Vous ne vous appelez pas Amina et vous ne venez pas d'Algérie. Ce sont les &lt;b&gt;structures&lt;/b&gt; qui se réemploient — « je m'appelle… », « je viens de… » — pas les phrases entières.</a:t>
+              <a:t>Vous ne vous appelez pas Amina et vous ne venez pas d'Algérie. Ce sont les </a:t>
+            </a:r>
+            <a:r>
+              <a:rPr sz="2000" b="1" i="0">
+                <a:solidFill>
+                  <a:srgbClr val="4B4F52"/>
+                </a:solidFill>
+                <a:latin typeface="Verdana"/>
+              </a:rPr>
+              <a:t>structures</a:t>
+            </a:r>
+            <a:r>
+              <a:rPr sz="2000" b="0" i="0">
+                <a:solidFill>
+                  <a:srgbClr val="4B4F52"/>
+                </a:solidFill>
+                <a:latin typeface="Verdana"/>
+              </a:rPr>
+              <a:t> qui se réemploient — « je m'appelle… », « je viens de… » — pas les phrases entières.</a:t>
             </a:r>
           </a:p>
         </p:txBody>
